--- a/认知与案例-金句版.pptx
+++ b/认知与案例-金句版.pptx
@@ -15,9 +15,12 @@
     <p:sldId id="263" r:id="rId9"/>
     <p:sldId id="264" r:id="rId10"/>
     <p:sldId id="265" r:id="rId11"/>
+    <p:sldId id="266" r:id="rId12"/>
+    <p:sldId id="267" r:id="rId13"/>
+    <p:sldId id="268" r:id="rId14"/>
   </p:sldIdLst>
   <p:notesMasterIdLst>
-    <p:notesMasterId r:id="rId12"/>
+    <p:notesMasterId r:id="rId15"/>
   </p:notesMasterIdLst>
   <p:sldSz cx="9144000" cy="5143500"/>
   <p:notesSz cx="5143500" cy="9144000"/>
@@ -623,6 +626,270 @@
             <a:fld id="{F7021451-1387-4CA6-816F-3879F97B5CBC}" type="slidenum">
               <a:rPr lang="en-US"/>
               <a:t>10</a:t>
+            </a:fld>
+            <a:endParaRPr lang="en-US"/>
+          </a:p>
+        </p:txBody>
+      </p:sp>
+    </p:spTree>
+    <p:extLst>
+      <p:ext uri="{BB962C8B-B14F-4D97-AF65-F5344CB8AC3E}">
+        <p14:creationId xmlns:p14="http://schemas.microsoft.com/office/powerpoint/2010/main" val="1024086991"/>
+      </p:ext>
+    </p:extLst>
+  </p:cSld>
+  <p:clrMapOvr>
+    <a:masterClrMapping/>
+  </p:clrMapOvr>
+</p:notes>
+</file>
+
+<file path=ppt/notesSlides/notesSlide11.xml><?xml version="1.0" encoding="utf-8"?>
+<p:notes xmlns:a="http://schemas.openxmlformats.org/drawingml/2006/main" xmlns:r="http://schemas.openxmlformats.org/officeDocument/2006/relationships" xmlns:p="http://schemas.openxmlformats.org/presentationml/2006/main">
+  <p:cSld>
+    <p:spTree>
+      <p:nvGrpSpPr>
+        <p:cNvPr id="1" name=""/>
+        <p:cNvGrpSpPr/>
+        <p:nvPr/>
+      </p:nvGrpSpPr>
+      <p:grpSpPr>
+        <a:xfrm>
+          <a:off x="0" y="0"/>
+          <a:ext cx="0" cy="0"/>
+          <a:chOff x="0" y="0"/>
+          <a:chExt cx="0" cy="0"/>
+        </a:xfrm>
+      </p:grpSpPr>
+      <p:sp>
+        <p:nvSpPr>
+          <p:cNvPr id="2" name="Slide Image Placeholder 1"/>
+          <p:cNvSpPr>
+            <a:spLocks noGrp="1" noRot="1" noChangeAspect="1"/>
+          </p:cNvSpPr>
+          <p:nvPr>
+            <p:ph type="sldImg"/>
+          </p:nvPr>
+        </p:nvSpPr>
+        <p:spPr/>
+      </p:sp>
+      <p:sp>
+        <p:nvSpPr>
+          <p:cNvPr id="3" name="Notes Placeholder 2"/>
+          <p:cNvSpPr>
+            <a:spLocks noGrp="1"/>
+          </p:cNvSpPr>
+          <p:nvPr>
+            <p:ph type="body" idx="1"/>
+          </p:nvPr>
+        </p:nvSpPr>
+        <p:spPr/>
+        <p:txBody>
+          <a:bodyPr/>
+          <a:lstStyle/>
+          <a:p>
+            <a:r>
+              <a:rPr lang="en-US" dirty="0"/>
+              <a:t/>
+            </a:r>
+            <a:endParaRPr lang="en-US" dirty="0"/>
+          </a:p>
+        </p:txBody>
+      </p:sp>
+      <p:sp>
+        <p:nvSpPr>
+          <p:cNvPr id="4" name="Slide Number Placeholder 3"/>
+          <p:cNvSpPr>
+            <a:spLocks noGrp="1"/>
+          </p:cNvSpPr>
+          <p:nvPr>
+            <p:ph type="sldNum" sz="quarter" idx="10"/>
+          </p:nvPr>
+        </p:nvSpPr>
+        <p:spPr/>
+        <p:txBody>
+          <a:bodyPr/>
+          <a:lstStyle/>
+          <a:p>
+            <a:fld id="{F7021451-1387-4CA6-816F-3879F97B5CBC}" type="slidenum">
+              <a:rPr lang="en-US"/>
+              <a:t>11</a:t>
+            </a:fld>
+            <a:endParaRPr lang="en-US"/>
+          </a:p>
+        </p:txBody>
+      </p:sp>
+    </p:spTree>
+    <p:extLst>
+      <p:ext uri="{BB962C8B-B14F-4D97-AF65-F5344CB8AC3E}">
+        <p14:creationId xmlns:p14="http://schemas.microsoft.com/office/powerpoint/2010/main" val="1024086991"/>
+      </p:ext>
+    </p:extLst>
+  </p:cSld>
+  <p:clrMapOvr>
+    <a:masterClrMapping/>
+  </p:clrMapOvr>
+</p:notes>
+</file>
+
+<file path=ppt/notesSlides/notesSlide12.xml><?xml version="1.0" encoding="utf-8"?>
+<p:notes xmlns:a="http://schemas.openxmlformats.org/drawingml/2006/main" xmlns:r="http://schemas.openxmlformats.org/officeDocument/2006/relationships" xmlns:p="http://schemas.openxmlformats.org/presentationml/2006/main">
+  <p:cSld>
+    <p:spTree>
+      <p:nvGrpSpPr>
+        <p:cNvPr id="1" name=""/>
+        <p:cNvGrpSpPr/>
+        <p:nvPr/>
+      </p:nvGrpSpPr>
+      <p:grpSpPr>
+        <a:xfrm>
+          <a:off x="0" y="0"/>
+          <a:ext cx="0" cy="0"/>
+          <a:chOff x="0" y="0"/>
+          <a:chExt cx="0" cy="0"/>
+        </a:xfrm>
+      </p:grpSpPr>
+      <p:sp>
+        <p:nvSpPr>
+          <p:cNvPr id="2" name="Slide Image Placeholder 1"/>
+          <p:cNvSpPr>
+            <a:spLocks noGrp="1" noRot="1" noChangeAspect="1"/>
+          </p:cNvSpPr>
+          <p:nvPr>
+            <p:ph type="sldImg"/>
+          </p:nvPr>
+        </p:nvSpPr>
+        <p:spPr/>
+      </p:sp>
+      <p:sp>
+        <p:nvSpPr>
+          <p:cNvPr id="3" name="Notes Placeholder 2"/>
+          <p:cNvSpPr>
+            <a:spLocks noGrp="1"/>
+          </p:cNvSpPr>
+          <p:nvPr>
+            <p:ph type="body" idx="1"/>
+          </p:nvPr>
+        </p:nvSpPr>
+        <p:spPr/>
+        <p:txBody>
+          <a:bodyPr/>
+          <a:lstStyle/>
+          <a:p>
+            <a:r>
+              <a:rPr lang="en-US" dirty="0"/>
+              <a:t/>
+            </a:r>
+            <a:endParaRPr lang="en-US" dirty="0"/>
+          </a:p>
+        </p:txBody>
+      </p:sp>
+      <p:sp>
+        <p:nvSpPr>
+          <p:cNvPr id="4" name="Slide Number Placeholder 3"/>
+          <p:cNvSpPr>
+            <a:spLocks noGrp="1"/>
+          </p:cNvSpPr>
+          <p:nvPr>
+            <p:ph type="sldNum" sz="quarter" idx="10"/>
+          </p:nvPr>
+        </p:nvSpPr>
+        <p:spPr/>
+        <p:txBody>
+          <a:bodyPr/>
+          <a:lstStyle/>
+          <a:p>
+            <a:fld id="{F7021451-1387-4CA6-816F-3879F97B5CBC}" type="slidenum">
+              <a:rPr lang="en-US"/>
+              <a:t>12</a:t>
+            </a:fld>
+            <a:endParaRPr lang="en-US"/>
+          </a:p>
+        </p:txBody>
+      </p:sp>
+    </p:spTree>
+    <p:extLst>
+      <p:ext uri="{BB962C8B-B14F-4D97-AF65-F5344CB8AC3E}">
+        <p14:creationId xmlns:p14="http://schemas.microsoft.com/office/powerpoint/2010/main" val="1024086991"/>
+      </p:ext>
+    </p:extLst>
+  </p:cSld>
+  <p:clrMapOvr>
+    <a:masterClrMapping/>
+  </p:clrMapOvr>
+</p:notes>
+</file>
+
+<file path=ppt/notesSlides/notesSlide13.xml><?xml version="1.0" encoding="utf-8"?>
+<p:notes xmlns:a="http://schemas.openxmlformats.org/drawingml/2006/main" xmlns:r="http://schemas.openxmlformats.org/officeDocument/2006/relationships" xmlns:p="http://schemas.openxmlformats.org/presentationml/2006/main">
+  <p:cSld>
+    <p:spTree>
+      <p:nvGrpSpPr>
+        <p:cNvPr id="1" name=""/>
+        <p:cNvGrpSpPr/>
+        <p:nvPr/>
+      </p:nvGrpSpPr>
+      <p:grpSpPr>
+        <a:xfrm>
+          <a:off x="0" y="0"/>
+          <a:ext cx="0" cy="0"/>
+          <a:chOff x="0" y="0"/>
+          <a:chExt cx="0" cy="0"/>
+        </a:xfrm>
+      </p:grpSpPr>
+      <p:sp>
+        <p:nvSpPr>
+          <p:cNvPr id="2" name="Slide Image Placeholder 1"/>
+          <p:cNvSpPr>
+            <a:spLocks noGrp="1" noRot="1" noChangeAspect="1"/>
+          </p:cNvSpPr>
+          <p:nvPr>
+            <p:ph type="sldImg"/>
+          </p:nvPr>
+        </p:nvSpPr>
+        <p:spPr/>
+      </p:sp>
+      <p:sp>
+        <p:nvSpPr>
+          <p:cNvPr id="3" name="Notes Placeholder 2"/>
+          <p:cNvSpPr>
+            <a:spLocks noGrp="1"/>
+          </p:cNvSpPr>
+          <p:nvPr>
+            <p:ph type="body" idx="1"/>
+          </p:nvPr>
+        </p:nvSpPr>
+        <p:spPr/>
+        <p:txBody>
+          <a:bodyPr/>
+          <a:lstStyle/>
+          <a:p>
+            <a:r>
+              <a:rPr lang="en-US" dirty="0"/>
+              <a:t/>
+            </a:r>
+            <a:endParaRPr lang="en-US" dirty="0"/>
+          </a:p>
+        </p:txBody>
+      </p:sp>
+      <p:sp>
+        <p:nvSpPr>
+          <p:cNvPr id="4" name="Slide Number Placeholder 3"/>
+          <p:cNvSpPr>
+            <a:spLocks noGrp="1"/>
+          </p:cNvSpPr>
+          <p:nvPr>
+            <p:ph type="sldNum" sz="quarter" idx="10"/>
+          </p:nvPr>
+        </p:nvSpPr>
+        <p:spPr/>
+        <p:txBody>
+          <a:bodyPr/>
+          <a:lstStyle/>
+          <a:p>
+            <a:fld id="{F7021451-1387-4CA6-816F-3879F97B5CBC}" type="slidenum">
+              <a:rPr lang="en-US"/>
+              <a:t>13</a:t>
             </a:fld>
             <a:endParaRPr lang="en-US"/>
           </a:p>
@@ -1748,7 +2015,7 @@
                 <a:ea typeface="Arial" pitchFamily="34" charset="-122"/>
                 <a:cs typeface="Arial" pitchFamily="34" charset="-120"/>
               </a:rPr>
-              <a:t>金句版</a:t>
+              <a:t>金句版 V2</a:t>
             </a:r>
             <a:endParaRPr lang="en-US" sz="3200" dirty="0"/>
           </a:p>
@@ -1814,7 +2081,296 @@
         </p:nvSpPr>
         <p:spPr>
           <a:xfrm>
-            <a:off x="457200" y="274320"/>
+            <a:off x="457200" y="365760"/>
+            <a:ext cx="8229600" cy="548640"/>
+          </a:xfrm>
+          <a:prstGeom prst="rect">
+            <a:avLst/>
+          </a:prstGeom>
+          <a:noFill/>
+          <a:ln/>
+        </p:spPr>
+        <p:txBody>
+          <a:bodyPr wrap="square" rtlCol="0" anchor="ctr"/>
+          <a:lstStyle/>
+          <a:p>
+            <a:pPr algn="ctr" indent="0" marL="0">
+              <a:buNone/>
+            </a:pPr>
+            <a:r>
+              <a:rPr lang="en-US" sz="3600" dirty="0">
+                <a:solidFill>
+                  <a:srgbClr val="FFFFFF"/>
+                </a:solidFill>
+                <a:latin typeface="Arial" pitchFamily="34" charset="0"/>
+                <a:ea typeface="Arial" pitchFamily="34" charset="-122"/>
+                <a:cs typeface="Arial" pitchFamily="34" charset="-120"/>
+              </a:rPr>
+              <a:t>普通人思路</a:t>
+            </a:r>
+            <a:endParaRPr lang="en-US" sz="3600" dirty="0"/>
+          </a:p>
+        </p:txBody>
+      </p:sp>
+      <p:sp>
+        <p:nvSpPr>
+          <p:cNvPr id="3" name="Text 1"/>
+          <p:cNvSpPr/>
+          <p:nvPr/>
+        </p:nvSpPr>
+        <p:spPr>
+          <a:xfrm>
+            <a:off x="457200" y="914400"/>
+            <a:ext cx="3931920" cy="731520"/>
+          </a:xfrm>
+          <a:prstGeom prst="rect">
+            <a:avLst/>
+          </a:prstGeom>
+          <a:noFill/>
+          <a:ln/>
+        </p:spPr>
+        <p:txBody>
+          <a:bodyPr wrap="square" rtlCol="0" anchor="ctr"/>
+          <a:lstStyle/>
+          <a:p>
+            <a:pPr algn="ctr" indent="0" marL="0">
+              <a:buNone/>
+            </a:pPr>
+            <a:r>
+              <a:rPr lang="en-US" sz="3200" dirty="0">
+                <a:solidFill>
+                  <a:srgbClr val="FFFFFF"/>
+                </a:solidFill>
+                <a:latin typeface="Arial" pitchFamily="34" charset="0"/>
+                <a:ea typeface="Arial" pitchFamily="34" charset="-122"/>
+                <a:cs typeface="Arial" pitchFamily="34" charset="-120"/>
+              </a:rPr>
+              <a:t>最近的路</a:t>
+            </a:r>
+            <a:endParaRPr lang="en-US" sz="3200" dirty="0"/>
+          </a:p>
+        </p:txBody>
+      </p:sp>
+      <p:sp>
+        <p:nvSpPr>
+          <p:cNvPr id="4" name="Text 2"/>
+          <p:cNvSpPr/>
+          <p:nvPr/>
+        </p:nvSpPr>
+        <p:spPr>
+          <a:xfrm>
+            <a:off x="3931920" y="1005840"/>
+            <a:ext cx="1280160" cy="548640"/>
+          </a:xfrm>
+          <a:prstGeom prst="rect">
+            <a:avLst/>
+          </a:prstGeom>
+          <a:noFill/>
+          <a:ln/>
+        </p:spPr>
+        <p:txBody>
+          <a:bodyPr wrap="square" rtlCol="0" anchor="ctr"/>
+          <a:lstStyle/>
+          <a:p>
+            <a:pPr algn="ctr" indent="0" marL="0">
+              <a:buNone/>
+            </a:pPr>
+            <a:r>
+              <a:rPr lang="en-US" sz="2400" dirty="0">
+                <a:solidFill>
+                  <a:srgbClr val="FF6B35"/>
+                </a:solidFill>
+                <a:latin typeface="Arial" pitchFamily="34" charset="0"/>
+                <a:ea typeface="Arial" pitchFamily="34" charset="-122"/>
+                <a:cs typeface="Arial" pitchFamily="34" charset="-120"/>
+              </a:rPr>
+              <a:t>vs</a:t>
+            </a:r>
+            <a:endParaRPr lang="en-US" sz="2400" dirty="0"/>
+          </a:p>
+        </p:txBody>
+      </p:sp>
+      <p:sp>
+        <p:nvSpPr>
+          <p:cNvPr id="5" name="Text 3"/>
+          <p:cNvSpPr/>
+          <p:nvPr/>
+        </p:nvSpPr>
+        <p:spPr>
+          <a:xfrm>
+            <a:off x="5212080" y="914400"/>
+            <a:ext cx="3931920" cy="731520"/>
+          </a:xfrm>
+          <a:prstGeom prst="rect">
+            <a:avLst/>
+          </a:prstGeom>
+          <a:noFill/>
+          <a:ln/>
+        </p:spPr>
+        <p:txBody>
+          <a:bodyPr wrap="square" rtlCol="0" anchor="ctr"/>
+          <a:lstStyle/>
+          <a:p>
+            <a:pPr indent="0" marL="0">
+              <a:buNone/>
+            </a:pPr>
+            <a:r>
+              <a:rPr lang="en-US" sz="3200" dirty="0">
+                <a:solidFill>
+                  <a:srgbClr val="FF6B35"/>
+                </a:solidFill>
+                <a:latin typeface="Arial" pitchFamily="34" charset="0"/>
+                <a:ea typeface="Arial" pitchFamily="34" charset="-122"/>
+                <a:cs typeface="Arial" pitchFamily="34" charset="-120"/>
+              </a:rPr>
+              <a:t>最好的路</a:t>
+            </a:r>
+            <a:endParaRPr lang="en-US" sz="3200" dirty="0"/>
+          </a:p>
+        </p:txBody>
+      </p:sp>
+      <p:sp>
+        <p:nvSpPr>
+          <p:cNvPr id="6" name="Shape 4"/>
+          <p:cNvSpPr/>
+          <p:nvPr/>
+        </p:nvSpPr>
+        <p:spPr>
+          <a:xfrm>
+            <a:off x="914400" y="2011680"/>
+            <a:ext cx="7315200" cy="0"/>
+          </a:xfrm>
+          <a:prstGeom prst="line">
+            <a:avLst/>
+          </a:prstGeom>
+          <a:noFill/>
+          <a:ln w="12700">
+            <a:solidFill>
+              <a:srgbClr val="B0B0B0"/>
+            </a:solidFill>
+            <a:prstDash val="solid"/>
+          </a:ln>
+        </p:spPr>
+      </p:sp>
+      <p:sp>
+        <p:nvSpPr>
+          <p:cNvPr id="7" name="Text 5"/>
+          <p:cNvSpPr/>
+          <p:nvPr/>
+        </p:nvSpPr>
+        <p:spPr>
+          <a:xfrm>
+            <a:off x="457200" y="2286000"/>
+            <a:ext cx="3931920" cy="914400"/>
+          </a:xfrm>
+          <a:prstGeom prst="rect">
+            <a:avLst/>
+          </a:prstGeom>
+          <a:noFill/>
+          <a:ln/>
+        </p:spPr>
+        <p:txBody>
+          <a:bodyPr wrap="square" rtlCol="0" anchor="ctr"/>
+          <a:lstStyle/>
+          <a:p>
+            <a:pPr algn="ctr" indent="0" marL="0">
+              <a:buNone/>
+            </a:pPr>
+            <a:r>
+              <a:rPr lang="en-US" sz="1800" dirty="0">
+                <a:solidFill>
+                  <a:srgbClr val="B0B0B0"/>
+                </a:solidFill>
+                <a:latin typeface="Arial" pitchFamily="34" charset="0"/>
+                <a:ea typeface="Arial" pitchFamily="34" charset="-122"/>
+                <a:cs typeface="Arial" pitchFamily="34" charset="-120"/>
+              </a:rPr>
+              <a:t>最快变现\n但可能不是长期最优</a:t>
+            </a:r>
+            <a:endParaRPr lang="en-US" sz="1800" dirty="0"/>
+          </a:p>
+        </p:txBody>
+      </p:sp>
+      <p:sp>
+        <p:nvSpPr>
+          <p:cNvPr id="8" name="Text 6"/>
+          <p:cNvSpPr/>
+          <p:nvPr/>
+        </p:nvSpPr>
+        <p:spPr>
+          <a:xfrm>
+            <a:off x="4754880" y="2286000"/>
+            <a:ext cx="3931920" cy="914400"/>
+          </a:xfrm>
+          <a:prstGeom prst="rect">
+            <a:avLst/>
+          </a:prstGeom>
+          <a:noFill/>
+          <a:ln/>
+        </p:spPr>
+        <p:txBody>
+          <a:bodyPr wrap="square" rtlCol="0" anchor="ctr"/>
+          <a:lstStyle/>
+          <a:p>
+            <a:pPr algn="ctr" indent="0" marL="0">
+              <a:buNone/>
+            </a:pPr>
+            <a:r>
+              <a:rPr lang="en-US" sz="1800" dirty="0">
+                <a:solidFill>
+                  <a:srgbClr val="B0B0B0"/>
+                </a:solidFill>
+                <a:latin typeface="Arial" pitchFamily="34" charset="0"/>
+                <a:ea typeface="Arial" pitchFamily="34" charset="-122"/>
+                <a:cs typeface="Arial" pitchFamily="34" charset="-120"/>
+              </a:rPr>
+              <a:t>长期价值\n但需要耐心积累</a:t>
+            </a:r>
+            <a:endParaRPr lang="en-US" sz="1800" dirty="0"/>
+          </a:p>
+        </p:txBody>
+      </p:sp>
+    </p:spTree>
+  </p:cSld>
+  <p:clrMapOvr>
+    <a:masterClrMapping/>
+  </p:clrMapOvr>
+</p:sld>
+</file>
+
+<file path=ppt/slides/slide11.xml><?xml version="1.0" encoding="utf-8"?>
+<p:sld xmlns:a="http://schemas.openxmlformats.org/drawingml/2006/main" xmlns:r="http://schemas.openxmlformats.org/officeDocument/2006/relationships" xmlns:p="http://schemas.openxmlformats.org/presentationml/2006/main">
+  <p:cSld name="Slide 11">
+    <p:bg>
+      <p:bgPr>
+        <a:solidFill>
+          <a:srgbClr val="0D0D0D"/>
+        </a:solidFill>
+      </p:bgPr>
+    </p:bg>
+    <p:spTree>
+      <p:nvGrpSpPr>
+        <p:cNvPr id="1" name=""/>
+        <p:cNvGrpSpPr/>
+        <p:nvPr/>
+      </p:nvGrpSpPr>
+      <p:grpSpPr>
+        <a:xfrm>
+          <a:off x="0" y="0"/>
+          <a:ext cx="0" cy="0"/>
+          <a:chOff x="0" y="0"/>
+          <a:chExt cx="0" cy="0"/>
+        </a:xfrm>
+      </p:grpSpPr>
+      <p:sp>
+        <p:nvSpPr>
+          <p:cNvPr id="2" name="Text 0"/>
+          <p:cNvSpPr/>
+          <p:nvPr/>
+        </p:nvSpPr>
+        <p:spPr>
+          <a:xfrm>
+            <a:off x="457200" y="365760"/>
             <a:ext cx="8229600" cy="548640"/>
           </a:xfrm>
           <a:prstGeom prst="rect">
@@ -1839,9 +2395,347 @@
                 <a:ea typeface="Arial" pitchFamily="34" charset="-122"/>
                 <a:cs typeface="Arial" pitchFamily="34" charset="-120"/>
               </a:rPr>
+              <a:t>傅盛案例</a:t>
+            </a:r>
+            <a:endParaRPr lang="en-US" sz="4000" dirty="0"/>
+          </a:p>
+        </p:txBody>
+      </p:sp>
+      <p:sp>
+        <p:nvSpPr>
+          <p:cNvPr id="3" name="Text 1"/>
+          <p:cNvSpPr/>
+          <p:nvPr/>
+        </p:nvSpPr>
+        <p:spPr>
+          <a:xfrm>
+            <a:off x="457200" y="914400"/>
+            <a:ext cx="8229600" cy="457200"/>
+          </a:xfrm>
+          <a:prstGeom prst="rect">
+            <a:avLst/>
+          </a:prstGeom>
+          <a:noFill/>
+          <a:ln/>
+        </p:spPr>
+        <p:txBody>
+          <a:bodyPr wrap="square" rtlCol="0" anchor="ctr"/>
+          <a:lstStyle/>
+          <a:p>
+            <a:pPr algn="ctr" indent="0" marL="0">
+              <a:buNone/>
+            </a:pPr>
+            <a:r>
+              <a:rPr lang="en-US" sz="2800" dirty="0">
+                <a:solidFill>
+                  <a:srgbClr val="FFFFFF"/>
+                </a:solidFill>
+                <a:latin typeface="Arial" pitchFamily="34" charset="0"/>
+                <a:ea typeface="Arial" pitchFamily="34" charset="-122"/>
+                <a:cs typeface="Arial" pitchFamily="34" charset="-120"/>
+              </a:rPr>
+              <a:t>明线</a:t>
+            </a:r>
+            <a:endParaRPr lang="en-US" sz="2800" dirty="0"/>
+          </a:p>
+        </p:txBody>
+      </p:sp>
+      <p:sp>
+        <p:nvSpPr>
+          <p:cNvPr id="4" name="Shape 2"/>
+          <p:cNvSpPr/>
+          <p:nvPr/>
+        </p:nvSpPr>
+        <p:spPr>
+          <a:xfrm>
+            <a:off x="3200400" y="1463040"/>
+            <a:ext cx="2743200" cy="27432"/>
+          </a:xfrm>
+          <a:prstGeom prst="rect">
+            <a:avLst/>
+          </a:prstGeom>
+          <a:solidFill>
+            <a:srgbClr val="FF6B35"/>
+          </a:solidFill>
+          <a:ln/>
+        </p:spPr>
+      </p:sp>
+      <p:sp>
+        <p:nvSpPr>
+          <p:cNvPr id="5" name="Text 3"/>
+          <p:cNvSpPr/>
+          <p:nvPr/>
+        </p:nvSpPr>
+        <p:spPr>
+          <a:xfrm>
+            <a:off x="457200" y="1828800"/>
+            <a:ext cx="8229600" cy="1645920"/>
+          </a:xfrm>
+          <a:prstGeom prst="rect">
+            <a:avLst/>
+          </a:prstGeom>
+          <a:noFill/>
+          <a:ln/>
+        </p:spPr>
+        <p:txBody>
+          <a:bodyPr wrap="square" rtlCol="0" anchor="ctr"/>
+          <a:lstStyle/>
+          <a:p>
+            <a:pPr algn="ctr" indent="0" marL="0">
+              <a:buNone/>
+            </a:pPr>
+            <a:r>
+              <a:rPr lang="en-US" sz="2400" dirty="0">
+                <a:solidFill>
+                  <a:srgbClr val="B0B0B0"/>
+                </a:solidFill>
+                <a:latin typeface="Arial" pitchFamily="34" charset="0"/>
+                <a:ea typeface="Arial" pitchFamily="34" charset="-122"/>
+                <a:cs typeface="Arial" pitchFamily="34" charset="-120"/>
+              </a:rPr>
+              <a:t>all in AI\n砍掉非核心业务\n推出AI产品</a:t>
+            </a:r>
+            <a:endParaRPr lang="en-US" sz="2400" dirty="0"/>
+          </a:p>
+        </p:txBody>
+      </p:sp>
+    </p:spTree>
+  </p:cSld>
+  <p:clrMapOvr>
+    <a:masterClrMapping/>
+  </p:clrMapOvr>
+</p:sld>
+</file>
+
+<file path=ppt/slides/slide12.xml><?xml version="1.0" encoding="utf-8"?>
+<p:sld xmlns:a="http://schemas.openxmlformats.org/drawingml/2006/main" xmlns:r="http://schemas.openxmlformats.org/officeDocument/2006/relationships" xmlns:p="http://schemas.openxmlformats.org/presentationml/2006/main">
+  <p:cSld name="Slide 12">
+    <p:bg>
+      <p:bgPr>
+        <a:solidFill>
+          <a:srgbClr val="0D0D0D"/>
+        </a:solidFill>
+      </p:bgPr>
+    </p:bg>
+    <p:spTree>
+      <p:nvGrpSpPr>
+        <p:cNvPr id="1" name=""/>
+        <p:cNvGrpSpPr/>
+        <p:nvPr/>
+      </p:nvGrpSpPr>
+      <p:grpSpPr>
+        <a:xfrm>
+          <a:off x="0" y="0"/>
+          <a:ext cx="0" cy="0"/>
+          <a:chOff x="0" y="0"/>
+          <a:chExt cx="0" cy="0"/>
+        </a:xfrm>
+      </p:grpSpPr>
+      <p:sp>
+        <p:nvSpPr>
+          <p:cNvPr id="2" name="Text 0"/>
+          <p:cNvSpPr/>
+          <p:nvPr/>
+        </p:nvSpPr>
+        <p:spPr>
+          <a:xfrm>
+            <a:off x="457200" y="365760"/>
+            <a:ext cx="8229600" cy="548640"/>
+          </a:xfrm>
+          <a:prstGeom prst="rect">
+            <a:avLst/>
+          </a:prstGeom>
+          <a:noFill/>
+          <a:ln/>
+        </p:spPr>
+        <p:txBody>
+          <a:bodyPr wrap="square" rtlCol="0" anchor="ctr"/>
+          <a:lstStyle/>
+          <a:p>
+            <a:pPr algn="ctr" indent="0" marL="0">
+              <a:buNone/>
+            </a:pPr>
+            <a:r>
+              <a:rPr lang="en-US" sz="4000" b="1" dirty="0">
+                <a:solidFill>
+                  <a:srgbClr val="FF6B35"/>
+                </a:solidFill>
+                <a:latin typeface="Arial" pitchFamily="34" charset="0"/>
+                <a:ea typeface="Arial" pitchFamily="34" charset="-122"/>
+                <a:cs typeface="Arial" pitchFamily="34" charset="-120"/>
+              </a:rPr>
+              <a:t>傅盛案例</a:t>
+            </a:r>
+            <a:endParaRPr lang="en-US" sz="4000" dirty="0"/>
+          </a:p>
+        </p:txBody>
+      </p:sp>
+      <p:sp>
+        <p:nvSpPr>
+          <p:cNvPr id="3" name="Text 1"/>
+          <p:cNvSpPr/>
+          <p:nvPr/>
+        </p:nvSpPr>
+        <p:spPr>
+          <a:xfrm>
+            <a:off x="457200" y="914400"/>
+            <a:ext cx="8229600" cy="457200"/>
+          </a:xfrm>
+          <a:prstGeom prst="rect">
+            <a:avLst/>
+          </a:prstGeom>
+          <a:noFill/>
+          <a:ln/>
+        </p:spPr>
+        <p:txBody>
+          <a:bodyPr wrap="square" rtlCol="0" anchor="ctr"/>
+          <a:lstStyle/>
+          <a:p>
+            <a:pPr algn="ctr" indent="0" marL="0">
+              <a:buNone/>
+            </a:pPr>
+            <a:r>
+              <a:rPr lang="en-US" sz="2800" dirty="0">
+                <a:solidFill>
+                  <a:srgbClr val="FFFFFF"/>
+                </a:solidFill>
+                <a:latin typeface="Arial" pitchFamily="34" charset="0"/>
+                <a:ea typeface="Arial" pitchFamily="34" charset="-122"/>
+                <a:cs typeface="Arial" pitchFamily="34" charset="-120"/>
+              </a:rPr>
+              <a:t>暗线</a:t>
+            </a:r>
+            <a:endParaRPr lang="en-US" sz="2800" dirty="0"/>
+          </a:p>
+        </p:txBody>
+      </p:sp>
+      <p:sp>
+        <p:nvSpPr>
+          <p:cNvPr id="4" name="Shape 2"/>
+          <p:cNvSpPr/>
+          <p:nvPr/>
+        </p:nvSpPr>
+        <p:spPr>
+          <a:xfrm>
+            <a:off x="3200400" y="1463040"/>
+            <a:ext cx="2743200" cy="27432"/>
+          </a:xfrm>
+          <a:prstGeom prst="rect">
+            <a:avLst/>
+          </a:prstGeom>
+          <a:solidFill>
+            <a:srgbClr val="FF6B35"/>
+          </a:solidFill>
+          <a:ln/>
+        </p:spPr>
+      </p:sp>
+      <p:sp>
+        <p:nvSpPr>
+          <p:cNvPr id="5" name="Text 3"/>
+          <p:cNvSpPr/>
+          <p:nvPr/>
+        </p:nvSpPr>
+        <p:spPr>
+          <a:xfrm>
+            <a:off x="457200" y="1828800"/>
+            <a:ext cx="8229600" cy="1645920"/>
+          </a:xfrm>
+          <a:prstGeom prst="rect">
+            <a:avLst/>
+          </a:prstGeom>
+          <a:noFill/>
+          <a:ln/>
+        </p:spPr>
+        <p:txBody>
+          <a:bodyPr wrap="square" rtlCol="0" anchor="ctr"/>
+          <a:lstStyle/>
+          <a:p>
+            <a:pPr algn="ctr" indent="0" marL="0">
+              <a:buNone/>
+            </a:pPr>
+            <a:r>
+              <a:rPr lang="en-US" sz="2400" dirty="0">
+                <a:solidFill>
+                  <a:srgbClr val="B0B0B0"/>
+                </a:solidFill>
+                <a:latin typeface="Arial" pitchFamily="34" charset="0"/>
+                <a:ea typeface="Arial" pitchFamily="34" charset="-122"/>
+                <a:cs typeface="Arial" pitchFamily="34" charset="-120"/>
+              </a:rPr>
+              <a:t>聚焦+坚持\n长期主义\n相信相信的力量</a:t>
+            </a:r>
+            <a:endParaRPr lang="en-US" sz="2400" dirty="0"/>
+          </a:p>
+        </p:txBody>
+      </p:sp>
+    </p:spTree>
+  </p:cSld>
+  <p:clrMapOvr>
+    <a:masterClrMapping/>
+  </p:clrMapOvr>
+</p:sld>
+</file>
+
+<file path=ppt/slides/slide13.xml><?xml version="1.0" encoding="utf-8"?>
+<p:sld xmlns:a="http://schemas.openxmlformats.org/drawingml/2006/main" xmlns:r="http://schemas.openxmlformats.org/officeDocument/2006/relationships" xmlns:p="http://schemas.openxmlformats.org/presentationml/2006/main">
+  <p:cSld name="Slide 13">
+    <p:bg>
+      <p:bgPr>
+        <a:solidFill>
+          <a:srgbClr val="0D0D0D"/>
+        </a:solidFill>
+      </p:bgPr>
+    </p:bg>
+    <p:spTree>
+      <p:nvGrpSpPr>
+        <p:cNvPr id="1" name=""/>
+        <p:cNvGrpSpPr/>
+        <p:nvPr/>
+      </p:nvGrpSpPr>
+      <p:grpSpPr>
+        <a:xfrm>
+          <a:off x="0" y="0"/>
+          <a:ext cx="0" cy="0"/>
+          <a:chOff x="0" y="0"/>
+          <a:chExt cx="0" cy="0"/>
+        </a:xfrm>
+      </p:grpSpPr>
+      <p:sp>
+        <p:nvSpPr>
+          <p:cNvPr id="2" name="Text 0"/>
+          <p:cNvSpPr/>
+          <p:nvPr/>
+        </p:nvSpPr>
+        <p:spPr>
+          <a:xfrm>
+            <a:off x="457200" y="274320"/>
+            <a:ext cx="8229600" cy="548640"/>
+          </a:xfrm>
+          <a:prstGeom prst="rect">
+            <a:avLst/>
+          </a:prstGeom>
+          <a:noFill/>
+          <a:ln/>
+        </p:spPr>
+        <p:txBody>
+          <a:bodyPr wrap="square" rtlCol="0" anchor="ctr"/>
+          <a:lstStyle/>
+          <a:p>
+            <a:pPr algn="ctr" indent="0" marL="0">
+              <a:buNone/>
+            </a:pPr>
+            <a:r>
+              <a:rPr lang="en-US" sz="4400" b="1" dirty="0">
+                <a:solidFill>
+                  <a:srgbClr val="FF6B35"/>
+                </a:solidFill>
+                <a:latin typeface="Arial" pitchFamily="34" charset="0"/>
+                <a:ea typeface="Arial" pitchFamily="34" charset="-122"/>
+                <a:cs typeface="Arial" pitchFamily="34" charset="-120"/>
+              </a:rPr>
               <a:t>四步走计划</a:t>
             </a:r>
-            <a:endParaRPr lang="en-US" sz="4000" dirty="0"/>
+            <a:endParaRPr lang="en-US" sz="4400" dirty="0"/>
           </a:p>
         </p:txBody>
       </p:sp>
@@ -2080,7 +2974,7 @@
         </p:nvSpPr>
         <p:spPr>
           <a:xfrm>
-            <a:off x="457200" y="365760"/>
+            <a:off x="457200" y="731520"/>
             <a:ext cx="8229600" cy="640080"/>
           </a:xfrm>
           <a:prstGeom prst="rect">
@@ -2097,7 +2991,85 @@
               <a:buNone/>
             </a:pPr>
             <a:r>
-              <a:rPr lang="en-US" sz="4400" b="1" dirty="0">
+              <a:rPr lang="en-US" sz="3200" dirty="0">
+                <a:solidFill>
+                  <a:srgbClr val="FFFFFF"/>
+                </a:solidFill>
+                <a:latin typeface="Arial" pitchFamily="34" charset="0"/>
+                <a:ea typeface="Arial" pitchFamily="34" charset="-122"/>
+                <a:cs typeface="Arial" pitchFamily="34" charset="-120"/>
+              </a:rPr>
+              <a:t>市面上的项目很多</a:t>
+            </a:r>
+            <a:endParaRPr lang="en-US" sz="3200" dirty="0"/>
+          </a:p>
+        </p:txBody>
+      </p:sp>
+      <p:sp>
+        <p:nvSpPr>
+          <p:cNvPr id="3" name="Text 1"/>
+          <p:cNvSpPr/>
+          <p:nvPr/>
+        </p:nvSpPr>
+        <p:spPr>
+          <a:xfrm>
+            <a:off x="457200" y="1371600"/>
+            <a:ext cx="8229600" cy="640080"/>
+          </a:xfrm>
+          <a:prstGeom prst="rect">
+            <a:avLst/>
+          </a:prstGeom>
+          <a:noFill/>
+          <a:ln/>
+        </p:spPr>
+        <p:txBody>
+          <a:bodyPr wrap="square" rtlCol="0" anchor="ctr"/>
+          <a:lstStyle/>
+          <a:p>
+            <a:pPr algn="ctr" indent="0" marL="0">
+              <a:buNone/>
+            </a:pPr>
+            <a:r>
+              <a:rPr lang="en-US" sz="3200" dirty="0">
+                <a:solidFill>
+                  <a:srgbClr val="FFFFFF"/>
+                </a:solidFill>
+                <a:latin typeface="Arial" pitchFamily="34" charset="0"/>
+                <a:ea typeface="Arial" pitchFamily="34" charset="-122"/>
+                <a:cs typeface="Arial" pitchFamily="34" charset="-120"/>
+              </a:rPr>
+              <a:t>真正跑出案例的</a:t>
+            </a:r>
+            <a:endParaRPr lang="en-US" sz="3200" dirty="0"/>
+          </a:p>
+        </p:txBody>
+      </p:sp>
+      <p:sp>
+        <p:nvSpPr>
+          <p:cNvPr id="4" name="Text 2"/>
+          <p:cNvSpPr/>
+          <p:nvPr/>
+        </p:nvSpPr>
+        <p:spPr>
+          <a:xfrm>
+            <a:off x="457200" y="2103120"/>
+            <a:ext cx="8229600" cy="731520"/>
+          </a:xfrm>
+          <a:prstGeom prst="rect">
+            <a:avLst/>
+          </a:prstGeom>
+          <a:noFill/>
+          <a:ln/>
+        </p:spPr>
+        <p:txBody>
+          <a:bodyPr wrap="square" rtlCol="0" anchor="ctr"/>
+          <a:lstStyle/>
+          <a:p>
+            <a:pPr algn="ctr" indent="0" marL="0">
+              <a:buNone/>
+            </a:pPr>
+            <a:r>
+              <a:rPr lang="en-US" sz="4800" b="1" dirty="0">
                 <a:solidFill>
                   <a:srgbClr val="FF6B35"/>
                 </a:solidFill>
@@ -2105,22 +3077,22 @@
                 <a:ea typeface="Arial" pitchFamily="34" charset="-122"/>
                 <a:cs typeface="Arial" pitchFamily="34" charset="-120"/>
               </a:rPr>
-              <a:t>不做什么</a:t>
-            </a:r>
-            <a:endParaRPr lang="en-US" sz="4400" dirty="0"/>
-          </a:p>
-        </p:txBody>
-      </p:sp>
-      <p:sp>
-        <p:nvSpPr>
-          <p:cNvPr id="3" name="Text 1"/>
-          <p:cNvSpPr/>
-          <p:nvPr/>
-        </p:nvSpPr>
-        <p:spPr>
-          <a:xfrm>
-            <a:off x="457200" y="914400"/>
-            <a:ext cx="8229600" cy="640080"/>
+              <a:t>很少</a:t>
+            </a:r>
+            <a:endParaRPr lang="en-US" sz="4800" dirty="0"/>
+          </a:p>
+        </p:txBody>
+      </p:sp>
+      <p:sp>
+        <p:nvSpPr>
+          <p:cNvPr id="5" name="Text 3"/>
+          <p:cNvSpPr/>
+          <p:nvPr/>
+        </p:nvSpPr>
+        <p:spPr>
+          <a:xfrm>
+            <a:off x="457200" y="3200400"/>
+            <a:ext cx="8229600" cy="548640"/>
           </a:xfrm>
           <a:prstGeom prst="rect">
             <a:avLst/>
@@ -2136,66 +3108,7 @@
               <a:buNone/>
             </a:pPr>
             <a:r>
-              <a:rPr lang="en-US" sz="4400" b="1" dirty="0">
-                <a:solidFill>
-                  <a:srgbClr val="FFFFFF"/>
-                </a:solidFill>
-                <a:latin typeface="Arial" pitchFamily="34" charset="0"/>
-                <a:ea typeface="Arial" pitchFamily="34" charset="-122"/>
-                <a:cs typeface="Arial" pitchFamily="34" charset="-120"/>
-              </a:rPr>
-              <a:t>比做什么更重要</a:t>
-            </a:r>
-            <a:endParaRPr lang="en-US" sz="4400" dirty="0"/>
-          </a:p>
-        </p:txBody>
-      </p:sp>
-      <p:sp>
-        <p:nvSpPr>
-          <p:cNvPr id="4" name="Shape 2"/>
-          <p:cNvSpPr/>
-          <p:nvPr/>
-        </p:nvSpPr>
-        <p:spPr>
-          <a:xfrm>
-            <a:off x="1828800" y="1737360"/>
-            <a:ext cx="5486400" cy="27432"/>
-          </a:xfrm>
-          <a:prstGeom prst="rect">
-            <a:avLst/>
-          </a:prstGeom>
-          <a:solidFill>
-            <a:srgbClr val="FF6B35"/>
-          </a:solidFill>
-          <a:ln/>
-        </p:spPr>
-      </p:sp>
-      <p:sp>
-        <p:nvSpPr>
-          <p:cNvPr id="5" name="Text 3"/>
-          <p:cNvSpPr/>
-          <p:nvPr/>
-        </p:nvSpPr>
-        <p:spPr>
-          <a:xfrm>
-            <a:off x="457200" y="2103120"/>
-            <a:ext cx="8229600" cy="1371600"/>
-          </a:xfrm>
-          <a:prstGeom prst="rect">
-            <a:avLst/>
-          </a:prstGeom>
-          <a:noFill/>
-          <a:ln/>
-        </p:spPr>
-        <p:txBody>
-          <a:bodyPr wrap="square" rtlCol="0" anchor="ctr"/>
-          <a:lstStyle/>
-          <a:p>
-            <a:pPr algn="ctr" indent="0" marL="0">
-              <a:buNone/>
-            </a:pPr>
-            <a:r>
-              <a:rPr lang="en-US" sz="2400" dirty="0">
+              <a:rPr lang="en-US" sz="2200" dirty="0">
                 <a:solidFill>
                   <a:srgbClr val="B0B0B0"/>
                 </a:solidFill>
@@ -2203,9 +3116,9 @@
                 <a:ea typeface="Arial" pitchFamily="34" charset="-122"/>
                 <a:cs typeface="Arial" pitchFamily="34" charset="-120"/>
               </a:rPr>
-              <a:t>做减法 = 保护核心精力\n少即是多</a:t>
-            </a:r>
-            <a:endParaRPr lang="en-US" sz="2400" dirty="0"/>
+              <a:t>案例才是核心竞争力</a:t>
+            </a:r>
+            <a:endParaRPr lang="en-US" sz="2200" dirty="0"/>
           </a:p>
         </p:txBody>
       </p:sp>
@@ -2274,7 +3187,7 @@
                 <a:ea typeface="Arial" pitchFamily="34" charset="-122"/>
                 <a:cs typeface="Arial" pitchFamily="34" charset="-120"/>
               </a:rPr>
-              <a:t>盘需求</a:t>
+              <a:t>不做什么</a:t>
             </a:r>
             <a:endParaRPr lang="en-US" sz="4800" dirty="0"/>
           </a:p>
@@ -2305,7 +3218,7 @@
               <a:buNone/>
             </a:pPr>
             <a:r>
-              <a:rPr lang="en-US" sz="4800" b="1" dirty="0">
+              <a:rPr lang="en-US" sz="4000" dirty="0">
                 <a:solidFill>
                   <a:srgbClr val="FFFFFF"/>
                 </a:solidFill>
@@ -2313,9 +3226,9 @@
                 <a:ea typeface="Arial" pitchFamily="34" charset="-122"/>
                 <a:cs typeface="Arial" pitchFamily="34" charset="-120"/>
               </a:rPr>
-              <a:t>赢了一大半</a:t>
-            </a:r>
-            <a:endParaRPr lang="en-US" sz="4800" dirty="0"/>
+              <a:t>比做什么更重要</a:t>
+            </a:r>
+            <a:endParaRPr lang="en-US" sz="4000" dirty="0"/>
           </a:p>
         </p:txBody>
       </p:sp>
@@ -2328,7 +3241,7 @@
         <p:spPr>
           <a:xfrm>
             <a:off x="457200" y="2560320"/>
-            <a:ext cx="8229600" cy="1097280"/>
+            <a:ext cx="8229600" cy="548640"/>
           </a:xfrm>
           <a:prstGeom prst="rect">
             <a:avLst/>
@@ -2352,7 +3265,7 @@
                 <a:ea typeface="Arial" pitchFamily="34" charset="-122"/>
                 <a:cs typeface="Arial" pitchFamily="34" charset="-120"/>
               </a:rPr>
-              <a:t>需求搞清楚了\n解决方案就完成了一半</a:t>
+              <a:t>做减法 = 保护核心精力</a:t>
             </a:r>
             <a:endParaRPr lang="en-US" sz="2200" dirty="0"/>
           </a:p>
@@ -2423,7 +3336,7 @@
                 <a:ea typeface="Arial" pitchFamily="34" charset="-122"/>
                 <a:cs typeface="Arial" pitchFamily="34" charset="-120"/>
               </a:rPr>
-              <a:t>让子弹飞一会儿</a:t>
+              <a:t>盘需求</a:t>
             </a:r>
             <a:endParaRPr lang="en-US" sz="4800" dirty="0"/>
           </a:p>
@@ -2437,8 +3350,8 @@
         </p:nvSpPr>
         <p:spPr>
           <a:xfrm>
-            <a:off x="457200" y="1828800"/>
-            <a:ext cx="8229600" cy="1097280"/>
+            <a:off x="457200" y="1463040"/>
+            <a:ext cx="8229600" cy="731520"/>
           </a:xfrm>
           <a:prstGeom prst="rect">
             <a:avLst/>
@@ -2454,7 +3367,46 @@
               <a:buNone/>
             </a:pPr>
             <a:r>
-              <a:rPr lang="en-US" sz="2200" dirty="0">
+              <a:rPr lang="en-US" sz="4400" dirty="0">
+                <a:solidFill>
+                  <a:srgbClr val="FFFFFF"/>
+                </a:solidFill>
+                <a:latin typeface="Arial" pitchFamily="34" charset="0"/>
+                <a:ea typeface="Arial" pitchFamily="34" charset="-122"/>
+                <a:cs typeface="Arial" pitchFamily="34" charset="-120"/>
+              </a:rPr>
+              <a:t>赢了一大半</a:t>
+            </a:r>
+            <a:endParaRPr lang="en-US" sz="4400" dirty="0"/>
+          </a:p>
+        </p:txBody>
+      </p:sp>
+      <p:sp>
+        <p:nvSpPr>
+          <p:cNvPr id="4" name="Text 2"/>
+          <p:cNvSpPr/>
+          <p:nvPr/>
+        </p:nvSpPr>
+        <p:spPr>
+          <a:xfrm>
+            <a:off x="457200" y="2560320"/>
+            <a:ext cx="8229600" cy="1097280"/>
+          </a:xfrm>
+          <a:prstGeom prst="rect">
+            <a:avLst/>
+          </a:prstGeom>
+          <a:noFill/>
+          <a:ln/>
+        </p:spPr>
+        <p:txBody>
+          <a:bodyPr wrap="square" rtlCol="0" anchor="ctr"/>
+          <a:lstStyle/>
+          <a:p>
+            <a:pPr algn="ctr" indent="0" marL="0">
+              <a:buNone/>
+            </a:pPr>
+            <a:r>
+              <a:rPr lang="en-US" sz="2400" dirty="0">
                 <a:solidFill>
                   <a:srgbClr val="B0B0B0"/>
                 </a:solidFill>
@@ -2462,48 +3414,9 @@
                 <a:ea typeface="Arial" pitchFamily="34" charset="-122"/>
                 <a:cs typeface="Arial" pitchFamily="34" charset="-120"/>
               </a:rPr>
-              <a:t>AI 变化太快\n不要急于下结论</a:t>
-            </a:r>
-            <a:endParaRPr lang="en-US" sz="2200" dirty="0"/>
-          </a:p>
-        </p:txBody>
-      </p:sp>
-      <p:sp>
-        <p:nvSpPr>
-          <p:cNvPr id="4" name="Text 2"/>
-          <p:cNvSpPr/>
-          <p:nvPr/>
-        </p:nvSpPr>
-        <p:spPr>
-          <a:xfrm>
-            <a:off x="457200" y="3200400"/>
-            <a:ext cx="8229600" cy="548640"/>
-          </a:xfrm>
-          <a:prstGeom prst="rect">
-            <a:avLst/>
-          </a:prstGeom>
-          <a:noFill/>
-          <a:ln/>
-        </p:spPr>
-        <p:txBody>
-          <a:bodyPr wrap="square" rtlCol="0" anchor="ctr"/>
-          <a:lstStyle/>
-          <a:p>
-            <a:pPr algn="ctr" indent="0" marL="0">
-              <a:buNone/>
-            </a:pPr>
-            <a:r>
-              <a:rPr lang="en-US" sz="1800" dirty="0">
-                <a:solidFill>
-                  <a:srgbClr val="B0B0B0"/>
-                </a:solidFill>
-                <a:latin typeface="Arial" pitchFamily="34" charset="0"/>
-                <a:ea typeface="Arial" pitchFamily="34" charset="-122"/>
-                <a:cs typeface="Arial" pitchFamily="34" charset="-120"/>
-              </a:rPr>
-              <a:t>保持观察，持续迭代</a:t>
-            </a:r>
-            <a:endParaRPr lang="en-US" sz="1800" dirty="0"/>
+              <a:t>需求搞清楚\n解决方案就完成了一半</a:t>
+            </a:r>
+            <a:endParaRPr lang="en-US" sz="2400" dirty="0"/>
           </a:p>
         </p:txBody>
       </p:sp>
@@ -2547,8 +3460,8 @@
         </p:nvSpPr>
         <p:spPr>
           <a:xfrm>
-            <a:off x="457200" y="365760"/>
-            <a:ext cx="8229600" cy="548640"/>
+            <a:off x="457200" y="548640"/>
+            <a:ext cx="8229600" cy="731520"/>
           </a:xfrm>
           <a:prstGeom prst="rect">
             <a:avLst/>
@@ -2564,7 +3477,7 @@
               <a:buNone/>
             </a:pPr>
             <a:r>
-              <a:rPr lang="en-US" sz="4000" b="1" dirty="0">
+              <a:rPr lang="en-US" sz="4800" b="1" dirty="0">
                 <a:solidFill>
                   <a:srgbClr val="FF6B35"/>
                 </a:solidFill>
@@ -2572,9 +3485,9 @@
                 <a:ea typeface="Arial" pitchFamily="34" charset="-122"/>
                 <a:cs typeface="Arial" pitchFamily="34" charset="-120"/>
               </a:rPr>
-              <a:t>AI边界</a:t>
-            </a:r>
-            <a:endParaRPr lang="en-US" sz="4000" dirty="0"/>
+              <a:t>让子弹飞一会儿</a:t>
+            </a:r>
+            <a:endParaRPr lang="en-US" sz="4800" dirty="0"/>
           </a:p>
         </p:txBody>
       </p:sp>
@@ -2586,7 +3499,7 @@
         </p:nvSpPr>
         <p:spPr>
           <a:xfrm>
-            <a:off x="457200" y="914400"/>
+            <a:off x="457200" y="1463040"/>
             <a:ext cx="8229600" cy="548640"/>
           </a:xfrm>
           <a:prstGeom prst="rect">
@@ -2603,7 +3516,7 @@
               <a:buNone/>
             </a:pPr>
             <a:r>
-              <a:rPr lang="en-US" sz="3600" dirty="0">
+              <a:rPr lang="en-US" sz="2600" dirty="0">
                 <a:solidFill>
                   <a:srgbClr val="FFFFFF"/>
                 </a:solidFill>
@@ -2611,45 +3524,22 @@
                 <a:ea typeface="Arial" pitchFamily="34" charset="-122"/>
                 <a:cs typeface="Arial" pitchFamily="34" charset="-120"/>
               </a:rPr>
-              <a:t>理论 vs 实际</a:t>
-            </a:r>
-            <a:endParaRPr lang="en-US" sz="3600" dirty="0"/>
-          </a:p>
-        </p:txBody>
-      </p:sp>
-      <p:sp>
-        <p:nvSpPr>
-          <p:cNvPr id="4" name="Shape 2"/>
-          <p:cNvSpPr/>
-          <p:nvPr/>
-        </p:nvSpPr>
-        <p:spPr>
-          <a:xfrm>
-            <a:off x="1828800" y="1645920"/>
-            <a:ext cx="5486400" cy="0"/>
-          </a:xfrm>
-          <a:prstGeom prst="line">
-            <a:avLst/>
-          </a:prstGeom>
-          <a:noFill/>
-          <a:ln w="25400">
-            <a:solidFill>
-              <a:srgbClr val="FF6B35"/>
-            </a:solidFill>
-            <a:prstDash val="solid"/>
-          </a:ln>
-        </p:spPr>
-      </p:sp>
-      <p:sp>
-        <p:nvSpPr>
-          <p:cNvPr id="5" name="Text 3"/>
-          <p:cNvSpPr/>
-          <p:nvPr/>
-        </p:nvSpPr>
-        <p:spPr>
-          <a:xfrm>
-            <a:off x="457200" y="2011680"/>
-            <a:ext cx="8229600" cy="1371600"/>
+              <a:t>AI 变化太快，不要急于下结论</a:t>
+            </a:r>
+            <a:endParaRPr lang="en-US" sz="2600" dirty="0"/>
+          </a:p>
+        </p:txBody>
+      </p:sp>
+      <p:sp>
+        <p:nvSpPr>
+          <p:cNvPr id="4" name="Text 2"/>
+          <p:cNvSpPr/>
+          <p:nvPr/>
+        </p:nvSpPr>
+        <p:spPr>
+          <a:xfrm>
+            <a:off x="457200" y="2377440"/>
+            <a:ext cx="8229600" cy="1645920"/>
           </a:xfrm>
           <a:prstGeom prst="rect">
             <a:avLst/>
@@ -2665,7 +3555,7 @@
               <a:buNone/>
             </a:pPr>
             <a:r>
-              <a:rPr lang="en-US" sz="2000" dirty="0">
+              <a:rPr lang="en-US" sz="2200" dirty="0">
                 <a:solidFill>
                   <a:srgbClr val="B0B0B0"/>
                 </a:solidFill>
@@ -2673,9 +3563,9 @@
                 <a:ea typeface="Arial" pitchFamily="34" charset="-122"/>
                 <a:cs typeface="Arial" pitchFamily="34" charset="-120"/>
               </a:rPr>
-              <a:t>理论：知识面广、24/7可用、成本下降\n实际：幻觉、需审核、落地有门槛</a:t>
-            </a:r>
-            <a:endParaRPr lang="en-US" sz="2000" dirty="0"/>
+              <a:t>保持观察\n持续迭代\n等待最佳时机</a:t>
+            </a:r>
+            <a:endParaRPr lang="en-US" sz="2200" dirty="0"/>
           </a:p>
         </p:txBody>
       </p:sp>
@@ -2719,8 +3609,8 @@
         </p:nvSpPr>
         <p:spPr>
           <a:xfrm>
-            <a:off x="457200" y="457200"/>
-            <a:ext cx="8229600" cy="640080"/>
+            <a:off x="457200" y="365760"/>
+            <a:ext cx="8229600" cy="548640"/>
           </a:xfrm>
           <a:prstGeom prst="rect">
             <a:avLst/>
@@ -2744,7 +3634,7 @@
                 <a:ea typeface="Arial" pitchFamily="34" charset="-122"/>
                 <a:cs typeface="Arial" pitchFamily="34" charset="-120"/>
               </a:rPr>
-              <a:t>龙虾 vs APP</a:t>
+              <a:t>AI边界</a:t>
             </a:r>
             <a:endParaRPr lang="en-US" sz="4400" dirty="0"/>
           </a:p>
@@ -2758,8 +3648,8 @@
         </p:nvSpPr>
         <p:spPr>
           <a:xfrm>
-            <a:off x="457200" y="1097280"/>
-            <a:ext cx="8229600" cy="548640"/>
+            <a:off x="457200" y="914400"/>
+            <a:ext cx="8229600" cy="457200"/>
           </a:xfrm>
           <a:prstGeom prst="rect">
             <a:avLst/>
@@ -2775,7 +3665,7 @@
               <a:buNone/>
             </a:pPr>
             <a:r>
-              <a:rPr lang="en-US" sz="3600" dirty="0">
+              <a:rPr lang="en-US" sz="3200" dirty="0">
                 <a:solidFill>
                   <a:srgbClr val="FFFFFF"/>
                 </a:solidFill>
@@ -2783,9 +3673,9 @@
                 <a:ea typeface="Arial" pitchFamily="34" charset="-122"/>
                 <a:cs typeface="Arial" pitchFamily="34" charset="-120"/>
               </a:rPr>
-              <a:t>工具适应你</a:t>
-            </a:r>
-            <a:endParaRPr lang="en-US" sz="3600" dirty="0"/>
+              <a:t>理论 vs 实际</a:t>
+            </a:r>
+            <a:endParaRPr lang="en-US" sz="3200" dirty="0"/>
           </a:p>
         </p:txBody>
       </p:sp>
@@ -2797,16 +3687,19 @@
         </p:nvSpPr>
         <p:spPr>
           <a:xfrm>
-            <a:off x="1371600" y="1828800"/>
-            <a:ext cx="6400800" cy="27432"/>
-          </a:xfrm>
-          <a:prstGeom prst="rect">
-            <a:avLst/>
-          </a:prstGeom>
-          <a:solidFill>
-            <a:srgbClr val="FF6B35"/>
-          </a:solidFill>
-          <a:ln/>
+            <a:off x="1828800" y="1554480"/>
+            <a:ext cx="5486400" cy="0"/>
+          </a:xfrm>
+          <a:prstGeom prst="line">
+            <a:avLst/>
+          </a:prstGeom>
+          <a:noFill/>
+          <a:ln w="25400">
+            <a:solidFill>
+              <a:srgbClr val="FF6B35"/>
+            </a:solidFill>
+            <a:prstDash val="solid"/>
+          </a:ln>
         </p:spPr>
       </p:sp>
       <p:sp>
@@ -2817,7 +3710,7 @@
         </p:nvSpPr>
         <p:spPr>
           <a:xfrm>
-            <a:off x="457200" y="2194560"/>
+            <a:off x="457200" y="2011680"/>
             <a:ext cx="8229600" cy="1371600"/>
           </a:xfrm>
           <a:prstGeom prst="rect">
@@ -2834,7 +3727,7 @@
               <a:buNone/>
             </a:pPr>
             <a:r>
-              <a:rPr lang="en-US" sz="2200" dirty="0">
+              <a:rPr lang="en-US" sz="2000" dirty="0">
                 <a:solidFill>
                   <a:srgbClr val="B0B0B0"/>
                 </a:solidFill>
@@ -2842,9 +3735,9 @@
                 <a:ea typeface="Arial" pitchFamily="34" charset="-122"/>
                 <a:cs typeface="Arial" pitchFamily="34" charset="-120"/>
               </a:rPr>
-              <a:t>用AI做事 = 提效降本（工具属性）\n用AI赚钱 = 商业闭环（产品属性）</a:t>
-            </a:r>
-            <a:endParaRPr lang="en-US" sz="2200" dirty="0"/>
+              <a:t>理论：知识面广、24/7可用、成本下降\n实际：幻觉、需审核、落地有门槛</a:t>
+            </a:r>
+            <a:endParaRPr lang="en-US" sz="2000" dirty="0"/>
           </a:p>
         </p:txBody>
       </p:sp>
@@ -2913,7 +3806,7 @@
                 <a:ea typeface="Arial" pitchFamily="34" charset="-122"/>
                 <a:cs typeface="Arial" pitchFamily="34" charset="-120"/>
               </a:rPr>
-              <a:t>畏难情绪真相</a:t>
+              <a:t>龙虾 vs APP</a:t>
             </a:r>
             <a:endParaRPr lang="en-US" sz="4400" dirty="0"/>
           </a:p>
@@ -2927,7 +3820,7 @@
         </p:nvSpPr>
         <p:spPr>
           <a:xfrm>
-            <a:off x="457200" y="1188720"/>
+            <a:off x="457200" y="1097280"/>
             <a:ext cx="8229600" cy="548640"/>
           </a:xfrm>
           <a:prstGeom prst="rect">
@@ -2944,7 +3837,7 @@
               <a:buNone/>
             </a:pPr>
             <a:r>
-              <a:rPr lang="en-US" sz="2800" dirty="0">
+              <a:rPr lang="en-US" sz="3600" dirty="0">
                 <a:solidFill>
                   <a:srgbClr val="FFFFFF"/>
                 </a:solidFill>
@@ -2952,22 +3845,42 @@
                 <a:ea typeface="Arial" pitchFamily="34" charset="-122"/>
                 <a:cs typeface="Arial" pitchFamily="34" charset="-120"/>
               </a:rPr>
-              <a:t>你不是不行</a:t>
-            </a:r>
-            <a:endParaRPr lang="en-US" sz="2800" dirty="0"/>
-          </a:p>
-        </p:txBody>
-      </p:sp>
-      <p:sp>
-        <p:nvSpPr>
-          <p:cNvPr id="4" name="Text 2"/>
-          <p:cNvSpPr/>
-          <p:nvPr/>
-        </p:nvSpPr>
-        <p:spPr>
-          <a:xfrm>
-            <a:off x="457200" y="1737360"/>
-            <a:ext cx="8229600" cy="548640"/>
+              <a:t>工具适应你</a:t>
+            </a:r>
+            <a:endParaRPr lang="en-US" sz="3600" dirty="0"/>
+          </a:p>
+        </p:txBody>
+      </p:sp>
+      <p:sp>
+        <p:nvSpPr>
+          <p:cNvPr id="4" name="Shape 2"/>
+          <p:cNvSpPr/>
+          <p:nvPr/>
+        </p:nvSpPr>
+        <p:spPr>
+          <a:xfrm>
+            <a:off x="1371600" y="1828800"/>
+            <a:ext cx="6400800" cy="27432"/>
+          </a:xfrm>
+          <a:prstGeom prst="rect">
+            <a:avLst/>
+          </a:prstGeom>
+          <a:solidFill>
+            <a:srgbClr val="FF6B35"/>
+          </a:solidFill>
+          <a:ln/>
+        </p:spPr>
+      </p:sp>
+      <p:sp>
+        <p:nvSpPr>
+          <p:cNvPr id="5" name="Text 3"/>
+          <p:cNvSpPr/>
+          <p:nvPr/>
+        </p:nvSpPr>
+        <p:spPr>
+          <a:xfrm>
+            <a:off x="457200" y="2194560"/>
+            <a:ext cx="8229600" cy="1371600"/>
           </a:xfrm>
           <a:prstGeom prst="rect">
             <a:avLst/>
@@ -2983,46 +3896,7 @@
               <a:buNone/>
             </a:pPr>
             <a:r>
-              <a:rPr lang="en-US" sz="2800" dirty="0">
-                <a:solidFill>
-                  <a:srgbClr val="FFFFFF"/>
-                </a:solidFill>
-                <a:latin typeface="Arial" pitchFamily="34" charset="0"/>
-                <a:ea typeface="Arial" pitchFamily="34" charset="-122"/>
-                <a:cs typeface="Arial" pitchFamily="34" charset="-120"/>
-              </a:rPr>
-              <a:t>你只是还没找到对的切入口</a:t>
-            </a:r>
-            <a:endParaRPr lang="en-US" sz="2800" dirty="0"/>
-          </a:p>
-        </p:txBody>
-      </p:sp>
-      <p:sp>
-        <p:nvSpPr>
-          <p:cNvPr id="5" name="Text 3"/>
-          <p:cNvSpPr/>
-          <p:nvPr/>
-        </p:nvSpPr>
-        <p:spPr>
-          <a:xfrm>
-            <a:off x="457200" y="2926080"/>
-            <a:ext cx="8229600" cy="731520"/>
-          </a:xfrm>
-          <a:prstGeom prst="rect">
-            <a:avLst/>
-          </a:prstGeom>
-          <a:noFill/>
-          <a:ln/>
-        </p:spPr>
-        <p:txBody>
-          <a:bodyPr wrap="square" rtlCol="0" anchor="ctr"/>
-          <a:lstStyle/>
-          <a:p>
-            <a:pPr algn="ctr" indent="0" marL="0">
-              <a:buNone/>
-            </a:pPr>
-            <a:r>
-              <a:rPr lang="en-US" sz="2400" dirty="0">
+              <a:rPr lang="en-US" sz="2200" dirty="0">
                 <a:solidFill>
                   <a:srgbClr val="B0B0B0"/>
                 </a:solidFill>
@@ -3030,9 +3904,9 @@
                 <a:ea typeface="Arial" pitchFamily="34" charset="-122"/>
                 <a:cs typeface="Arial" pitchFamily="34" charset="-120"/>
               </a:rPr>
-              <a:t>先完成，再完美</a:t>
-            </a:r>
-            <a:endParaRPr lang="en-US" sz="2400" dirty="0"/>
+              <a:t>用AI做事 = 提效降本（工具属性）\n用AI赚钱 = 商业闭环（产品属性）</a:t>
+            </a:r>
+            <a:endParaRPr lang="en-US" sz="2200" dirty="0"/>
           </a:p>
         </p:txBody>
       </p:sp>
@@ -3076,8 +3950,8 @@
         </p:nvSpPr>
         <p:spPr>
           <a:xfrm>
-            <a:off x="457200" y="365760"/>
-            <a:ext cx="8229600" cy="548640"/>
+            <a:off x="457200" y="457200"/>
+            <a:ext cx="8229600" cy="640080"/>
           </a:xfrm>
           <a:prstGeom prst="rect">
             <a:avLst/>
@@ -3093,7 +3967,7 @@
               <a:buNone/>
             </a:pPr>
             <a:r>
-              <a:rPr lang="en-US" sz="4000" b="1" dirty="0">
+              <a:rPr lang="en-US" sz="4400" b="1" dirty="0">
                 <a:solidFill>
                   <a:srgbClr val="FF6B35"/>
                 </a:solidFill>
@@ -3101,9 +3975,9 @@
                 <a:ea typeface="Arial" pitchFamily="34" charset="-122"/>
                 <a:cs typeface="Arial" pitchFamily="34" charset="-120"/>
               </a:rPr>
-              <a:t>傅盛案例</a:t>
-            </a:r>
-            <a:endParaRPr lang="en-US" sz="4000" dirty="0"/>
+              <a:t>畏难情绪真相</a:t>
+            </a:r>
+            <a:endParaRPr lang="en-US" sz="4400" dirty="0"/>
           </a:p>
         </p:txBody>
       </p:sp>
@@ -3115,8 +3989,8 @@
         </p:nvSpPr>
         <p:spPr>
           <a:xfrm>
-            <a:off x="457200" y="914400"/>
-            <a:ext cx="8229600" cy="457200"/>
+            <a:off x="457200" y="1188720"/>
+            <a:ext cx="8229600" cy="548640"/>
           </a:xfrm>
           <a:prstGeom prst="rect">
             <a:avLst/>
@@ -3140,7 +4014,7 @@
                 <a:ea typeface="Arial" pitchFamily="34" charset="-122"/>
                 <a:cs typeface="Arial" pitchFamily="34" charset="-120"/>
               </a:rPr>
-              <a:t>明线</a:t>
+              <a:t>你不是不行</a:t>
             </a:r>
             <a:endParaRPr lang="en-US" sz="2800" dirty="0"/>
           </a:p>
@@ -3148,23 +4022,42 @@
       </p:sp>
       <p:sp>
         <p:nvSpPr>
-          <p:cNvPr id="4" name="Shape 2"/>
-          <p:cNvSpPr/>
-          <p:nvPr/>
-        </p:nvSpPr>
-        <p:spPr>
-          <a:xfrm>
-            <a:off x="3200400" y="1463040"/>
-            <a:ext cx="2743200" cy="27432"/>
-          </a:xfrm>
-          <a:prstGeom prst="rect">
-            <a:avLst/>
-          </a:prstGeom>
-          <a:solidFill>
-            <a:srgbClr val="FF6B35"/>
-          </a:solidFill>
-          <a:ln/>
-        </p:spPr>
+          <p:cNvPr id="4" name="Text 2"/>
+          <p:cNvSpPr/>
+          <p:nvPr/>
+        </p:nvSpPr>
+        <p:spPr>
+          <a:xfrm>
+            <a:off x="457200" y="1737360"/>
+            <a:ext cx="8229600" cy="548640"/>
+          </a:xfrm>
+          <a:prstGeom prst="rect">
+            <a:avLst/>
+          </a:prstGeom>
+          <a:noFill/>
+          <a:ln/>
+        </p:spPr>
+        <p:txBody>
+          <a:bodyPr wrap="square" rtlCol="0" anchor="ctr"/>
+          <a:lstStyle/>
+          <a:p>
+            <a:pPr algn="ctr" indent="0" marL="0">
+              <a:buNone/>
+            </a:pPr>
+            <a:r>
+              <a:rPr lang="en-US" sz="2800" dirty="0">
+                <a:solidFill>
+                  <a:srgbClr val="FFFFFF"/>
+                </a:solidFill>
+                <a:latin typeface="Arial" pitchFamily="34" charset="0"/>
+                <a:ea typeface="Arial" pitchFamily="34" charset="-122"/>
+                <a:cs typeface="Arial" pitchFamily="34" charset="-120"/>
+              </a:rPr>
+              <a:t>你只是还没找到对的切入口</a:t>
+            </a:r>
+            <a:endParaRPr lang="en-US" sz="2800" dirty="0"/>
+          </a:p>
+        </p:txBody>
       </p:sp>
       <p:sp>
         <p:nvSpPr>
@@ -3174,8 +4067,8 @@
         </p:nvSpPr>
         <p:spPr>
           <a:xfrm>
-            <a:off x="457200" y="1828800"/>
-            <a:ext cx="8229600" cy="1645920"/>
+            <a:off x="457200" y="2926080"/>
+            <a:ext cx="8229600" cy="731520"/>
           </a:xfrm>
           <a:prstGeom prst="rect">
             <a:avLst/>
@@ -3199,7 +4092,7 @@
                 <a:ea typeface="Arial" pitchFamily="34" charset="-122"/>
                 <a:cs typeface="Arial" pitchFamily="34" charset="-120"/>
               </a:rPr>
-              <a:t>all in AI\n砍掉非核心业务\n推出AI产品</a:t>
+              <a:t>先完成，再完美</a:t>
             </a:r>
             <a:endParaRPr lang="en-US" sz="2400" dirty="0"/>
           </a:p>
@@ -3245,8 +4138,8 @@
         </p:nvSpPr>
         <p:spPr>
           <a:xfrm>
-            <a:off x="457200" y="365760"/>
-            <a:ext cx="8229600" cy="548640"/>
+            <a:off x="457200" y="457200"/>
+            <a:ext cx="8229600" cy="640080"/>
           </a:xfrm>
           <a:prstGeom prst="rect">
             <a:avLst/>
@@ -3262,7 +4155,7 @@
               <a:buNone/>
             </a:pPr>
             <a:r>
-              <a:rPr lang="en-US" sz="4000" b="1" dirty="0">
+              <a:rPr lang="en-US" sz="4400" b="1" dirty="0">
                 <a:solidFill>
                   <a:srgbClr val="FF6B35"/>
                 </a:solidFill>
@@ -3270,9 +4163,9 @@
                 <a:ea typeface="Arial" pitchFamily="34" charset="-122"/>
                 <a:cs typeface="Arial" pitchFamily="34" charset="-120"/>
               </a:rPr>
-              <a:t>傅盛案例</a:t>
-            </a:r>
-            <a:endParaRPr lang="en-US" sz="4000" dirty="0"/>
+              <a:t>先业务再技能</a:t>
+            </a:r>
+            <a:endParaRPr lang="en-US" sz="4400" dirty="0"/>
           </a:p>
         </p:txBody>
       </p:sp>
@@ -3284,7 +4177,7 @@
         </p:nvSpPr>
         <p:spPr>
           <a:xfrm>
-            <a:off x="457200" y="914400"/>
+            <a:off x="457200" y="1097280"/>
             <a:ext cx="8229600" cy="457200"/>
           </a:xfrm>
           <a:prstGeom prst="rect">
@@ -3301,7 +4194,7 @@
               <a:buNone/>
             </a:pPr>
             <a:r>
-              <a:rPr lang="en-US" sz="2800" dirty="0">
+              <a:rPr lang="en-US" sz="2400" dirty="0">
                 <a:solidFill>
                   <a:srgbClr val="FFFFFF"/>
                 </a:solidFill>
@@ -3309,9 +4202,9 @@
                 <a:ea typeface="Arial" pitchFamily="34" charset="-122"/>
                 <a:cs typeface="Arial" pitchFamily="34" charset="-120"/>
               </a:rPr>
-              <a:t>暗线</a:t>
-            </a:r>
-            <a:endParaRPr lang="en-US" sz="2800" dirty="0"/>
+              <a:t>我的原则</a:t>
+            </a:r>
+            <a:endParaRPr lang="en-US" sz="2400" dirty="0"/>
           </a:p>
         </p:txBody>
       </p:sp>
@@ -3323,8 +4216,8 @@
         </p:nvSpPr>
         <p:spPr>
           <a:xfrm>
-            <a:off x="3200400" y="1463040"/>
-            <a:ext cx="2743200" cy="27432"/>
+            <a:off x="2743200" y="1645920"/>
+            <a:ext cx="3657600" cy="27432"/>
           </a:xfrm>
           <a:prstGeom prst="rect">
             <a:avLst/>
@@ -3343,7 +4236,7 @@
         </p:nvSpPr>
         <p:spPr>
           <a:xfrm>
-            <a:off x="457200" y="1828800"/>
+            <a:off x="457200" y="2011680"/>
             <a:ext cx="8229600" cy="1645920"/>
           </a:xfrm>
           <a:prstGeom prst="rect">
@@ -3368,7 +4261,7 @@
                 <a:ea typeface="Arial" pitchFamily="34" charset="-122"/>
                 <a:cs typeface="Arial" pitchFamily="34" charset="-120"/>
               </a:rPr>
-              <a:t>聚焦+坚持\n长期主义\n相信相信的力量</a:t>
+              <a:t>先有业务\n再练技能\n技能服务于业务</a:t>
             </a:r>
             <a:endParaRPr lang="en-US" sz="2400" dirty="0"/>
           </a:p>
